--- a/classes/parte-17-profundizacion-para-certificaciones/311-clasificacion-y-ciclo-de-vida-de-los-datos/clase-311-presentacion.pptx
+++ b/classes/parte-17-profundizacion-para-certificaciones/311-clasificacion-y-ciclo-de-vida-de-los-datos/clase-311-presentacion.pptx
@@ -17,6 +17,10 @@
     <p:sldId id="265" r:id="rId16"/>
     <p:sldId id="266" r:id="rId17"/>
     <p:sldId id="267" r:id="rId18"/>
+    <p:sldId id="268" r:id="rId19"/>
+    <p:sldId id="269" r:id="rId20"/>
+    <p:sldId id="270" r:id="rId21"/>
+    <p:sldId id="271" r:id="rId22"/>
   </p:sldIdLst>
   <p:sldSz cx="9144000" cy="6858000" type="screen4x3"/>
   <p:notesSz cx="6858000" cy="9144000"/>
@@ -3198,7 +3202,7 @@
                   <a:srgbClr val="0B3D2E"/>
                 </a:solidFill>
               </a:rPr>
-              <a:t>⚠️ Errores comunes</a:t>
+              <a:t>🧪 Laboratorio guiado — Diseñar un esquema y una política de clasificación</a:t>
             </a:r>
           </a:p>
         </p:txBody>
@@ -3236,82 +3240,97 @@
                   <a:srgbClr val="22282E"/>
                 </a:solidFill>
               </a:rPr>
-              <a:t>•  "Todo es Confidencial" — Sobreclasificación: encarece controles y erosiona la etiqueta. Reserva los niveles altos para daño real y alto.</a:t>
-            </a:r>
-          </a:p>
-          <a:p>
-            <a:pPr>
-              <a:spcAft>
-                <a:spcPts val="600"/>
-              </a:spcAft>
-            </a:pPr>
-            <a:r>
-              <a:rPr sz="1500">
-                <a:solidFill>
-                  <a:srgbClr val="22282E"/>
-                </a:solidFill>
-              </a:rPr>
-              <a:t>•  El de TI decide la clasificación — Confusión de roles: clasifica el propietario de negocio; TI es custodio. Reasigna.</a:t>
-            </a:r>
-          </a:p>
-          <a:p>
-            <a:pPr>
-              <a:spcAft>
-                <a:spcPts val="600"/>
-              </a:spcAft>
-            </a:pPr>
-            <a:r>
-              <a:rPr sz="1500">
-                <a:solidFill>
-                  <a:srgbClr val="22282E"/>
-                </a:solidFill>
-              </a:rPr>
-              <a:t>•  Niveles sin criterios objetivos — Etiquetas sin definición → inconsistencia. Documenta criterio y ejemplos por nivel.</a:t>
-            </a:r>
-          </a:p>
-          <a:p>
-            <a:pPr>
-              <a:spcAft>
-                <a:spcPts val="600"/>
-              </a:spcAft>
-            </a:pPr>
-            <a:r>
-              <a:rPr sz="1500">
-                <a:solidFill>
-                  <a:srgbClr val="22282E"/>
-                </a:solidFill>
-              </a:rPr>
-              <a:t>•  Se clasifica el dato pero no se etiqueta — Sin marcado, la política no se aplica en la práctica. Añade guía de etiquetado obligatoria.</a:t>
-            </a:r>
-          </a:p>
-          <a:p>
-            <a:pPr>
-              <a:spcAft>
-                <a:spcPts val="600"/>
-              </a:spcAft>
-            </a:pPr>
-            <a:r>
-              <a:rPr sz="1500">
-                <a:solidFill>
-                  <a:srgbClr val="22282E"/>
-                </a:solidFill>
-              </a:rPr>
-              <a:t>•  Ignorar la agregación — Datos benignos agregados revelan lo sensible. Añade regla de agregación al esquema.</a:t>
-            </a:r>
-          </a:p>
-          <a:p>
-            <a:pPr>
-              <a:spcAft>
-                <a:spcPts val="600"/>
-              </a:spcAft>
-            </a:pPr>
-            <a:r>
-              <a:rPr sz="1500">
-                <a:solidFill>
-                  <a:srgbClr val="22282E"/>
-                </a:solidFill>
-              </a:rPr>
-              <a:t>•  Olvidar la fase de destrucción — Datos "muertos" siguen siendo pasivo de riesgo. Enlaza con retención y sanitización (clase 312).</a:t>
+              <a:t>•  Trabajarás sobre una empresa ficticia, "NovaSalud", clínica con datos clínicos y de pago.</a:t>
+            </a:r>
+          </a:p>
+          <a:p>
+            <a:pPr>
+              <a:spcAft>
+                <a:spcPts val="600"/>
+              </a:spcAft>
+            </a:pPr>
+            <a:r>
+              <a:rPr sz="1500">
+                <a:solidFill>
+                  <a:srgbClr val="22282E"/>
+                </a:solidFill>
+              </a:rPr>
+              <a:t>•  Inventario de activos. Crea una hoja con columnas: Activo, Tipo de dato,</a:t>
+            </a:r>
+          </a:p>
+          <a:p>
+            <a:pPr>
+              <a:spcAft>
+                <a:spcPts val="600"/>
+              </a:spcAft>
+            </a:pPr>
+            <a:r>
+              <a:rPr sz="1500">
+                <a:solidFill>
+                  <a:srgbClr val="22282E"/>
+                </a:solidFill>
+              </a:rPr>
+              <a:t>•  Ubicación, Formato, Propietario, Volumen. Registra al menos 8 activos</a:t>
+            </a:r>
+          </a:p>
+          <a:p>
+            <a:pPr>
+              <a:spcAft>
+                <a:spcPts val="600"/>
+              </a:spcAft>
+            </a:pPr>
+            <a:r>
+              <a:rPr sz="1500">
+                <a:solidFill>
+                  <a:srgbClr val="22282E"/>
+                </a:solidFill>
+              </a:rPr>
+              <a:t>•  (historias clínicas, nómina, tarjetas de pago, marketing, código fuente, etc.).</a:t>
+            </a:r>
+          </a:p>
+          <a:p>
+            <a:pPr>
+              <a:spcAft>
+                <a:spcPts val="600"/>
+              </a:spcAft>
+            </a:pPr>
+            <a:r>
+              <a:rPr sz="1500">
+                <a:solidFill>
+                  <a:srgbClr val="22282E"/>
+                </a:solidFill>
+              </a:rPr>
+              <a:t>•  Define el esquema de clasificación. Propón 4 niveles comerciales:</a:t>
+            </a:r>
+          </a:p>
+          <a:p>
+            <a:pPr>
+              <a:spcAft>
+                <a:spcPts val="600"/>
+              </a:spcAft>
+            </a:pPr>
+            <a:r>
+              <a:rPr sz="1500">
+                <a:solidFill>
+                  <a:srgbClr val="22282E"/>
+                </a:solidFill>
+              </a:rPr>
+              <a:t>•  Público, Interno, Confidencial, Restringido. Para cada uno documenta: criterio de</a:t>
+            </a:r>
+          </a:p>
+          <a:p>
+            <a:pPr>
+              <a:spcAft>
+                <a:spcPts val="600"/>
+              </a:spcAft>
+            </a:pPr>
+            <a:r>
+              <a:rPr sz="1500">
+                <a:solidFill>
+                  <a:srgbClr val="22282E"/>
+                </a:solidFill>
+              </a:rPr>
+              <a:t>•  asignación, ejemplos, impacto de una fuga y controles mínimos.</a:t>
             </a:r>
           </a:p>
         </p:txBody>
@@ -3362,7 +3381,7 @@
                   <a:srgbClr val="0B3D2E"/>
                 </a:solidFill>
               </a:rPr>
-              <a:t>❓ Preguntas frecuentes</a:t>
+              <a:t>✍️ Ejercicios</a:t>
             </a:r>
           </a:p>
         </p:txBody>
@@ -3400,97 +3419,82 @@
                   <a:srgbClr val="22282E"/>
                 </a:solidFill>
               </a:rPr>
-              <a:t>•  ❓ ¿Cuántos niveles de clasificación debe tener una empresa?</a:t>
-            </a:r>
-          </a:p>
-          <a:p>
-            <a:pPr>
-              <a:spcAft>
-                <a:spcPts val="600"/>
-              </a:spcAft>
-            </a:pPr>
-            <a:r>
-              <a:rPr sz="1500">
-                <a:solidFill>
-                  <a:srgbClr val="22282E"/>
-                </a:solidFill>
-              </a:rPr>
-              <a:t>•  No hay número mágico, pero 3–4 suele bastar en el mundo comercial. Demasiados niveles generan</a:t>
-            </a:r>
-          </a:p>
-          <a:p>
-            <a:pPr>
-              <a:spcAft>
-                <a:spcPts val="600"/>
-              </a:spcAft>
-            </a:pPr>
-            <a:r>
-              <a:rPr sz="1500">
-                <a:solidFill>
-                  <a:srgbClr val="22282E"/>
-                </a:solidFill>
-              </a:rPr>
-              <a:t>•  confusión; muy pocos no discriminan el riesgo. El gobierno usa Unclassified/Confidential/Secret/Top Secret.</a:t>
-            </a:r>
-          </a:p>
-          <a:p>
-            <a:pPr>
-              <a:spcAft>
-                <a:spcPts val="600"/>
-              </a:spcAft>
-            </a:pPr>
-            <a:r>
-              <a:rPr sz="1500">
-                <a:solidFill>
-                  <a:srgbClr val="22282E"/>
-                </a:solidFill>
-              </a:rPr>
-              <a:t>•  ❓ ¿Clasificación e categorización son lo mismo?</a:t>
-            </a:r>
-          </a:p>
-          <a:p>
-            <a:pPr>
-              <a:spcAft>
-                <a:spcPts val="600"/>
-              </a:spcAft>
-            </a:pPr>
-            <a:r>
-              <a:rPr sz="1500">
-                <a:solidFill>
-                  <a:srgbClr val="22282E"/>
-                </a:solidFill>
-              </a:rPr>
-              <a:t>•  No. La clasificación se centra en confidencialidad (¿qué daño causa la divulgación?). La</a:t>
-            </a:r>
-          </a:p>
-          <a:p>
-            <a:pPr>
-              <a:spcAft>
-                <a:spcPts val="600"/>
-              </a:spcAft>
-            </a:pPr>
-            <a:r>
-              <a:rPr sz="1500">
-                <a:solidFill>
-                  <a:srgbClr val="22282E"/>
-                </a:solidFill>
-              </a:rPr>
-              <a:t>•  categorización (FIPS 199) valora impacto en C-I-A para elegir líneas base de controles.</a:t>
-            </a:r>
-          </a:p>
-          <a:p>
-            <a:pPr>
-              <a:spcAft>
-                <a:spcPts val="600"/>
-              </a:spcAft>
-            </a:pPr>
-            <a:r>
-              <a:rPr sz="1500">
-                <a:solidFill>
-                  <a:srgbClr val="22282E"/>
-                </a:solidFill>
-              </a:rPr>
-              <a:t>•  ❓ ¿Quién es responsable si un dato mal clasificado se filtra?</a:t>
+              <a:t>•  Clasifica 10 tipos de dato reales de tu organización o de un caso conocido y justifica cada nivel.</a:t>
+            </a:r>
+          </a:p>
+          <a:p>
+            <a:pPr>
+              <a:spcAft>
+                <a:spcPts val="600"/>
+              </a:spcAft>
+            </a:pPr>
+            <a:r>
+              <a:rPr sz="1500">
+                <a:solidFill>
+                  <a:srgbClr val="22282E"/>
+                </a:solidFill>
+              </a:rPr>
+              <a:t>•  Explica con un ejemplo la diferencia entre propietario y custodio de datos.</a:t>
+            </a:r>
+          </a:p>
+          <a:p>
+            <a:pPr>
+              <a:spcAft>
+                <a:spcPts val="600"/>
+              </a:spcAft>
+            </a:pPr>
+            <a:r>
+              <a:rPr sz="1500">
+                <a:solidFill>
+                  <a:srgbClr val="22282E"/>
+                </a:solidFill>
+              </a:rPr>
+              <a:t>•  Aplica FIPS 199 a un sistema de reservas de hotel: asigna impacto C-I-A y su categoría.</a:t>
+            </a:r>
+          </a:p>
+          <a:p>
+            <a:pPr>
+              <a:spcAft>
+                <a:spcPts val="600"/>
+              </a:spcAft>
+            </a:pPr>
+            <a:r>
+              <a:rPr sz="1500">
+                <a:solidFill>
+                  <a:srgbClr val="22282E"/>
+                </a:solidFill>
+              </a:rPr>
+              <a:t>•  Redacta la sección "Manejo" para el nivel Restringido: transmisión, almacenamiento, impresión y descarte.</a:t>
+            </a:r>
+          </a:p>
+          <a:p>
+            <a:pPr>
+              <a:spcAft>
+                <a:spcPts val="600"/>
+              </a:spcAft>
+            </a:pPr>
+            <a:r>
+              <a:rPr sz="1500">
+                <a:solidFill>
+                  <a:srgbClr val="22282E"/>
+                </a:solidFill>
+              </a:rPr>
+              <a:t>•  Analiza un caso de reclasificación: ¿cuándo un dato Confidencial pasa a Público? Da criterios.</a:t>
+            </a:r>
+          </a:p>
+          <a:p>
+            <a:pPr>
+              <a:spcAft>
+                <a:spcPts val="600"/>
+              </a:spcAft>
+            </a:pPr>
+            <a:r>
+              <a:rPr sz="1500">
+                <a:solidFill>
+                  <a:srgbClr val="22282E"/>
+                </a:solidFill>
+              </a:rPr>
+              <a:t>•  Diseña una matriz que cruce nivel de clasificación × estado del dato (reposo/tránsito/uso) con el control exigido en cada celda.</a:t>
             </a:r>
           </a:p>
         </p:txBody>
@@ -3541,7 +3545,7 @@
                   <a:srgbClr val="0B3D2E"/>
                 </a:solidFill>
               </a:rPr>
-              <a:t>🔗 Referencias</a:t>
+              <a:t>📝 Reto verificable</a:t>
             </a:r>
           </a:p>
         </p:txBody>
@@ -3579,6 +3583,513 @@
                   <a:srgbClr val="22282E"/>
                 </a:solidFill>
               </a:rPr>
+              <a:t>•  Entrega una Política de Clasificación de Datos de 2–3 páginas para NovaSalud que incluya:</a:t>
+            </a:r>
+          </a:p>
+          <a:p>
+            <a:pPr>
+              <a:spcAft>
+                <a:spcPts val="600"/>
+              </a:spcAft>
+            </a:pPr>
+            <a:r>
+              <a:rPr sz="1500">
+                <a:solidFill>
+                  <a:srgbClr val="22282E"/>
+                </a:solidFill>
+              </a:rPr>
+              <a:t>•  esquema de 4 niveles con criterios, tabla de roles (owner/custodian/processor), guía de</a:t>
+            </a:r>
+          </a:p>
+          <a:p>
+            <a:pPr>
+              <a:spcAft>
+                <a:spcPts val="600"/>
+              </a:spcAft>
+            </a:pPr>
+            <a:r>
+              <a:rPr sz="1500">
+                <a:solidFill>
+                  <a:srgbClr val="22282E"/>
+                </a:solidFill>
+              </a:rPr>
+              <a:t>•  etiquetado y manejo por nivel, y el ciclo de vida con controles por fase.</a:t>
+            </a:r>
+          </a:p>
+          <a:p>
+            <a:pPr>
+              <a:spcAft>
+                <a:spcPts val="600"/>
+              </a:spcAft>
+            </a:pPr>
+            <a:r>
+              <a:rPr sz="1500">
+                <a:solidFill>
+                  <a:srgbClr val="22282E"/>
+                </a:solidFill>
+              </a:rPr>
+              <a:t>•  Criterio de aceptación: un revisor externo, leyendo solo tu política, puede clasificar</a:t>
+            </a:r>
+          </a:p>
+          <a:p>
+            <a:pPr>
+              <a:spcAft>
+                <a:spcPts val="600"/>
+              </a:spcAft>
+            </a:pPr>
+            <a:r>
+              <a:rPr sz="1500">
+                <a:solidFill>
+                  <a:srgbClr val="22282E"/>
+                </a:solidFill>
+              </a:rPr>
+              <a:t>•  correctamente 5 activos nuevos que no estaban en el inventario y decir qué controles aplicarles,</a:t>
+            </a:r>
+          </a:p>
+          <a:p>
+            <a:pPr>
+              <a:spcAft>
+                <a:spcPts val="600"/>
+              </a:spcAft>
+            </a:pPr>
+            <a:r>
+              <a:rPr sz="1500">
+                <a:solidFill>
+                  <a:srgbClr val="22282E"/>
+                </a:solidFill>
+              </a:rPr>
+              <a:t>•  sin hacerte ninguna pregunta adicional.</a:t>
+            </a:r>
+          </a:p>
+        </p:txBody>
+      </p:sp>
+    </p:spTree>
+  </p:cSld>
+  <p:clrMapOvr>
+    <a:masterClrMapping/>
+  </p:clrMapOvr>
+</p:sld>
+</file>
+
+<file path=ppt/slides/slide13.xml><?xml version="1.0" encoding="utf-8"?>
+<p:sld xmlns:a="http://schemas.openxmlformats.org/drawingml/2006/main" xmlns:p="http://schemas.openxmlformats.org/presentationml/2006/main" xmlns:r="http://schemas.openxmlformats.org/officeDocument/2006/relationships">
+  <p:cSld>
+    <p:spTree>
+      <p:nvGrpSpPr>
+        <p:cNvPr id="1" name=""/>
+        <p:cNvGrpSpPr/>
+        <p:nvPr/>
+      </p:nvGrpSpPr>
+      <p:grpSpPr/>
+      <p:sp>
+        <p:nvSpPr>
+          <p:cNvPr id="2" name="TextBox 1"/>
+          <p:cNvSpPr txBox="1"/>
+          <p:nvPr/>
+        </p:nvSpPr>
+        <p:spPr>
+          <a:xfrm>
+            <a:off x="457200" y="320040"/>
+            <a:ext cx="8229600" cy="822960"/>
+          </a:xfrm>
+          <a:prstGeom prst="rect">
+            <a:avLst/>
+          </a:prstGeom>
+          <a:noFill/>
+        </p:spPr>
+        <p:txBody>
+          <a:bodyPr wrap="square">
+            <a:spAutoFit/>
+          </a:bodyPr>
+          <a:lstStyle/>
+          <a:p>
+            <a:r>
+              <a:rPr sz="2600" b="1">
+                <a:solidFill>
+                  <a:srgbClr val="0B3D2E"/>
+                </a:solidFill>
+              </a:rPr>
+              <a:t>⚠️ Errores comunes</a:t>
+            </a:r>
+          </a:p>
+        </p:txBody>
+      </p:sp>
+      <p:sp>
+        <p:nvSpPr>
+          <p:cNvPr id="3" name="TextBox 2"/>
+          <p:cNvSpPr txBox="1"/>
+          <p:nvPr/>
+        </p:nvSpPr>
+        <p:spPr>
+          <a:xfrm>
+            <a:off x="457200" y="1280160"/>
+            <a:ext cx="8229600" cy="4937760"/>
+          </a:xfrm>
+          <a:prstGeom prst="rect">
+            <a:avLst/>
+          </a:prstGeom>
+          <a:noFill/>
+        </p:spPr>
+        <p:txBody>
+          <a:bodyPr wrap="square">
+            <a:spAutoFit/>
+          </a:bodyPr>
+          <a:lstStyle/>
+          <a:p>
+            <a:pPr>
+              <a:spcAft>
+                <a:spcPts val="600"/>
+              </a:spcAft>
+            </a:pPr>
+            <a:r>
+              <a:rPr sz="1500">
+                <a:solidFill>
+                  <a:srgbClr val="22282E"/>
+                </a:solidFill>
+              </a:rPr>
+              <a:t>•  "Todo es Confidencial" — Sobreclasificación: encarece controles y erosiona la etiqueta. Reserva los niveles altos para daño real y alto.</a:t>
+            </a:r>
+          </a:p>
+          <a:p>
+            <a:pPr>
+              <a:spcAft>
+                <a:spcPts val="600"/>
+              </a:spcAft>
+            </a:pPr>
+            <a:r>
+              <a:rPr sz="1500">
+                <a:solidFill>
+                  <a:srgbClr val="22282E"/>
+                </a:solidFill>
+              </a:rPr>
+              <a:t>•  El de TI decide la clasificación — Confusión de roles: clasifica el propietario de negocio; TI es custodio. Reasigna.</a:t>
+            </a:r>
+          </a:p>
+          <a:p>
+            <a:pPr>
+              <a:spcAft>
+                <a:spcPts val="600"/>
+              </a:spcAft>
+            </a:pPr>
+            <a:r>
+              <a:rPr sz="1500">
+                <a:solidFill>
+                  <a:srgbClr val="22282E"/>
+                </a:solidFill>
+              </a:rPr>
+              <a:t>•  Niveles sin criterios objetivos — Etiquetas sin definición → inconsistencia. Documenta criterio y ejemplos por nivel.</a:t>
+            </a:r>
+          </a:p>
+          <a:p>
+            <a:pPr>
+              <a:spcAft>
+                <a:spcPts val="600"/>
+              </a:spcAft>
+            </a:pPr>
+            <a:r>
+              <a:rPr sz="1500">
+                <a:solidFill>
+                  <a:srgbClr val="22282E"/>
+                </a:solidFill>
+              </a:rPr>
+              <a:t>•  Se clasifica el dato pero no se etiqueta — Sin marcado, la política no se aplica en la práctica. Añade guía de etiquetado obligatoria.</a:t>
+            </a:r>
+          </a:p>
+          <a:p>
+            <a:pPr>
+              <a:spcAft>
+                <a:spcPts val="600"/>
+              </a:spcAft>
+            </a:pPr>
+            <a:r>
+              <a:rPr sz="1500">
+                <a:solidFill>
+                  <a:srgbClr val="22282E"/>
+                </a:solidFill>
+              </a:rPr>
+              <a:t>•  Ignorar la agregación — Datos benignos agregados revelan lo sensible. Añade regla de agregación al esquema.</a:t>
+            </a:r>
+          </a:p>
+          <a:p>
+            <a:pPr>
+              <a:spcAft>
+                <a:spcPts val="600"/>
+              </a:spcAft>
+            </a:pPr>
+            <a:r>
+              <a:rPr sz="1500">
+                <a:solidFill>
+                  <a:srgbClr val="22282E"/>
+                </a:solidFill>
+              </a:rPr>
+              <a:t>•  Olvidar la fase de destrucción — Datos "muertos" siguen siendo pasivo de riesgo. Enlaza con retención y sanitización (clase 312).</a:t>
+            </a:r>
+          </a:p>
+        </p:txBody>
+      </p:sp>
+    </p:spTree>
+  </p:cSld>
+  <p:clrMapOvr>
+    <a:masterClrMapping/>
+  </p:clrMapOvr>
+</p:sld>
+</file>
+
+<file path=ppt/slides/slide14.xml><?xml version="1.0" encoding="utf-8"?>
+<p:sld xmlns:a="http://schemas.openxmlformats.org/drawingml/2006/main" xmlns:p="http://schemas.openxmlformats.org/presentationml/2006/main" xmlns:r="http://schemas.openxmlformats.org/officeDocument/2006/relationships">
+  <p:cSld>
+    <p:spTree>
+      <p:nvGrpSpPr>
+        <p:cNvPr id="1" name=""/>
+        <p:cNvGrpSpPr/>
+        <p:nvPr/>
+      </p:nvGrpSpPr>
+      <p:grpSpPr/>
+      <p:sp>
+        <p:nvSpPr>
+          <p:cNvPr id="2" name="TextBox 1"/>
+          <p:cNvSpPr txBox="1"/>
+          <p:nvPr/>
+        </p:nvSpPr>
+        <p:spPr>
+          <a:xfrm>
+            <a:off x="457200" y="320040"/>
+            <a:ext cx="8229600" cy="822960"/>
+          </a:xfrm>
+          <a:prstGeom prst="rect">
+            <a:avLst/>
+          </a:prstGeom>
+          <a:noFill/>
+        </p:spPr>
+        <p:txBody>
+          <a:bodyPr wrap="square">
+            <a:spAutoFit/>
+          </a:bodyPr>
+          <a:lstStyle/>
+          <a:p>
+            <a:r>
+              <a:rPr sz="2600" b="1">
+                <a:solidFill>
+                  <a:srgbClr val="0B3D2E"/>
+                </a:solidFill>
+              </a:rPr>
+              <a:t>❓ Preguntas frecuentes</a:t>
+            </a:r>
+          </a:p>
+        </p:txBody>
+      </p:sp>
+      <p:sp>
+        <p:nvSpPr>
+          <p:cNvPr id="3" name="TextBox 2"/>
+          <p:cNvSpPr txBox="1"/>
+          <p:nvPr/>
+        </p:nvSpPr>
+        <p:spPr>
+          <a:xfrm>
+            <a:off x="457200" y="1280160"/>
+            <a:ext cx="8229600" cy="4937760"/>
+          </a:xfrm>
+          <a:prstGeom prst="rect">
+            <a:avLst/>
+          </a:prstGeom>
+          <a:noFill/>
+        </p:spPr>
+        <p:txBody>
+          <a:bodyPr wrap="square">
+            <a:spAutoFit/>
+          </a:bodyPr>
+          <a:lstStyle/>
+          <a:p>
+            <a:pPr>
+              <a:spcAft>
+                <a:spcPts val="600"/>
+              </a:spcAft>
+            </a:pPr>
+            <a:r>
+              <a:rPr sz="1500">
+                <a:solidFill>
+                  <a:srgbClr val="22282E"/>
+                </a:solidFill>
+              </a:rPr>
+              <a:t>•  ❓ ¿Cuántos niveles de clasificación debe tener una empresa?</a:t>
+            </a:r>
+          </a:p>
+          <a:p>
+            <a:pPr>
+              <a:spcAft>
+                <a:spcPts val="600"/>
+              </a:spcAft>
+            </a:pPr>
+            <a:r>
+              <a:rPr sz="1500">
+                <a:solidFill>
+                  <a:srgbClr val="22282E"/>
+                </a:solidFill>
+              </a:rPr>
+              <a:t>•  No hay número mágico, pero 3–4 suele bastar en el mundo comercial. Demasiados niveles generan</a:t>
+            </a:r>
+          </a:p>
+          <a:p>
+            <a:pPr>
+              <a:spcAft>
+                <a:spcPts val="600"/>
+              </a:spcAft>
+            </a:pPr>
+            <a:r>
+              <a:rPr sz="1500">
+                <a:solidFill>
+                  <a:srgbClr val="22282E"/>
+                </a:solidFill>
+              </a:rPr>
+              <a:t>•  confusión; muy pocos no discriminan el riesgo. El gobierno usa Unclassified/Confidential/Secret/Top Secret.</a:t>
+            </a:r>
+          </a:p>
+          <a:p>
+            <a:pPr>
+              <a:spcAft>
+                <a:spcPts val="600"/>
+              </a:spcAft>
+            </a:pPr>
+            <a:r>
+              <a:rPr sz="1500">
+                <a:solidFill>
+                  <a:srgbClr val="22282E"/>
+                </a:solidFill>
+              </a:rPr>
+              <a:t>•  ❓ ¿Clasificación e categorización son lo mismo?</a:t>
+            </a:r>
+          </a:p>
+          <a:p>
+            <a:pPr>
+              <a:spcAft>
+                <a:spcPts val="600"/>
+              </a:spcAft>
+            </a:pPr>
+            <a:r>
+              <a:rPr sz="1500">
+                <a:solidFill>
+                  <a:srgbClr val="22282E"/>
+                </a:solidFill>
+              </a:rPr>
+              <a:t>•  No. La clasificación se centra en confidencialidad (¿qué daño causa la divulgación?). La</a:t>
+            </a:r>
+          </a:p>
+          <a:p>
+            <a:pPr>
+              <a:spcAft>
+                <a:spcPts val="600"/>
+              </a:spcAft>
+            </a:pPr>
+            <a:r>
+              <a:rPr sz="1500">
+                <a:solidFill>
+                  <a:srgbClr val="22282E"/>
+                </a:solidFill>
+              </a:rPr>
+              <a:t>•  categorización (FIPS 199) valora impacto en C-I-A para elegir líneas base de controles.</a:t>
+            </a:r>
+          </a:p>
+          <a:p>
+            <a:pPr>
+              <a:spcAft>
+                <a:spcPts val="600"/>
+              </a:spcAft>
+            </a:pPr>
+            <a:r>
+              <a:rPr sz="1500">
+                <a:solidFill>
+                  <a:srgbClr val="22282E"/>
+                </a:solidFill>
+              </a:rPr>
+              <a:t>•  ❓ ¿Quién es responsable si un dato mal clasificado se filtra?</a:t>
+            </a:r>
+          </a:p>
+        </p:txBody>
+      </p:sp>
+    </p:spTree>
+  </p:cSld>
+  <p:clrMapOvr>
+    <a:masterClrMapping/>
+  </p:clrMapOvr>
+</p:sld>
+</file>
+
+<file path=ppt/slides/slide15.xml><?xml version="1.0" encoding="utf-8"?>
+<p:sld xmlns:a="http://schemas.openxmlformats.org/drawingml/2006/main" xmlns:p="http://schemas.openxmlformats.org/presentationml/2006/main" xmlns:r="http://schemas.openxmlformats.org/officeDocument/2006/relationships">
+  <p:cSld>
+    <p:spTree>
+      <p:nvGrpSpPr>
+        <p:cNvPr id="1" name=""/>
+        <p:cNvGrpSpPr/>
+        <p:nvPr/>
+      </p:nvGrpSpPr>
+      <p:grpSpPr/>
+      <p:sp>
+        <p:nvSpPr>
+          <p:cNvPr id="2" name="TextBox 1"/>
+          <p:cNvSpPr txBox="1"/>
+          <p:nvPr/>
+        </p:nvSpPr>
+        <p:spPr>
+          <a:xfrm>
+            <a:off x="457200" y="320040"/>
+            <a:ext cx="8229600" cy="822960"/>
+          </a:xfrm>
+          <a:prstGeom prst="rect">
+            <a:avLst/>
+          </a:prstGeom>
+          <a:noFill/>
+        </p:spPr>
+        <p:txBody>
+          <a:bodyPr wrap="square">
+            <a:spAutoFit/>
+          </a:bodyPr>
+          <a:lstStyle/>
+          <a:p>
+            <a:r>
+              <a:rPr sz="2600" b="1">
+                <a:solidFill>
+                  <a:srgbClr val="0B3D2E"/>
+                </a:solidFill>
+              </a:rPr>
+              <a:t>🔗 Referencias</a:t>
+            </a:r>
+          </a:p>
+        </p:txBody>
+      </p:sp>
+      <p:sp>
+        <p:nvSpPr>
+          <p:cNvPr id="3" name="TextBox 2"/>
+          <p:cNvSpPr txBox="1"/>
+          <p:nvPr/>
+        </p:nvSpPr>
+        <p:spPr>
+          <a:xfrm>
+            <a:off x="457200" y="1280160"/>
+            <a:ext cx="8229600" cy="4937760"/>
+          </a:xfrm>
+          <a:prstGeom prst="rect">
+            <a:avLst/>
+          </a:prstGeom>
+          <a:noFill/>
+        </p:spPr>
+        <p:txBody>
+          <a:bodyPr wrap="square">
+            <a:spAutoFit/>
+          </a:bodyPr>
+          <a:lstStyle/>
+          <a:p>
+            <a:pPr>
+              <a:spcAft>
+                <a:spcPts val="600"/>
+              </a:spcAft>
+            </a:pPr>
+            <a:r>
+              <a:rPr sz="1500">
+                <a:solidFill>
+                  <a:srgbClr val="22282E"/>
+                </a:solidFill>
+              </a:rPr>
               <a:t>•  (ISC)² — CISSP Official Study Guide, 9.ª ed., Dominio 2 Asset Security (Wiley/Sybex).</a:t>
             </a:r>
           </a:p>
@@ -3644,6 +4155,81 @@
           </a:p>
         </p:txBody>
       </p:sp>
+    </p:spTree>
+  </p:cSld>
+  <p:clrMapOvr>
+    <a:masterClrMapping/>
+  </p:clrMapOvr>
+</p:sld>
+</file>
+
+<file path=ppt/slides/slide16.xml><?xml version="1.0" encoding="utf-8"?>
+<p:sld xmlns:a="http://schemas.openxmlformats.org/drawingml/2006/main" xmlns:p="http://schemas.openxmlformats.org/presentationml/2006/main" xmlns:r="http://schemas.openxmlformats.org/officeDocument/2006/relationships">
+  <p:cSld>
+    <p:spTree>
+      <p:nvGrpSpPr>
+        <p:cNvPr id="1" name=""/>
+        <p:cNvGrpSpPr/>
+        <p:nvPr/>
+      </p:nvGrpSpPr>
+      <p:grpSpPr/>
+      <p:sp>
+        <p:nvSpPr>
+          <p:cNvPr id="2" name="TextBox 1"/>
+          <p:cNvSpPr txBox="1"/>
+          <p:nvPr/>
+        </p:nvSpPr>
+        <p:spPr>
+          <a:xfrm>
+            <a:off x="457200" y="274320"/>
+            <a:ext cx="8229600" cy="640080"/>
+          </a:xfrm>
+          <a:prstGeom prst="rect">
+            <a:avLst/>
+          </a:prstGeom>
+          <a:noFill/>
+        </p:spPr>
+        <p:txBody>
+          <a:bodyPr wrap="square">
+            <a:spAutoFit/>
+          </a:bodyPr>
+          <a:lstStyle/>
+          <a:p>
+            <a:r>
+              <a:rPr sz="2200" b="1">
+                <a:solidFill>
+                  <a:srgbClr val="0B3D2E"/>
+                </a:solidFill>
+              </a:rPr>
+              <a:t>Diagrama de la clase</a:t>
+            </a:r>
+          </a:p>
+        </p:txBody>
+      </p:sp>
+      <p:pic>
+        <p:nvPicPr>
+          <p:cNvPr id="3" name="Picture 2" descr="4f933fd7e72a9e23.png"/>
+          <p:cNvPicPr>
+            <a:picLocks noChangeAspect="1"/>
+          </p:cNvPicPr>
+          <p:nvPr/>
+        </p:nvPicPr>
+        <p:blipFill>
+          <a:blip r:embed="rId2"/>
+          <a:stretch>
+            <a:fillRect/>
+          </a:stretch>
+        </p:blipFill>
+        <p:spPr>
+          <a:xfrm>
+            <a:off x="457200" y="3270575"/>
+            <a:ext cx="8229600" cy="956930"/>
+          </a:xfrm>
+          <a:prstGeom prst="rect">
+            <a:avLst/>
+          </a:prstGeom>
+        </p:spPr>
+      </p:pic>
     </p:spTree>
   </p:cSld>
   <p:clrMapOvr>
@@ -4197,7 +4783,7 @@
                   <a:srgbClr val="0B3D2E"/>
                 </a:solidFill>
               </a:rPr>
-              <a:t>📖 Definiciones y características</a:t>
+              <a:t>🧠 Modelo mental y caso de decisión</a:t>
             </a:r>
           </a:p>
         </p:txBody>
@@ -4235,97 +4821,22 @@
                   <a:srgbClr val="22282E"/>
                 </a:solidFill>
               </a:rPr>
-              <a:t>•  Clasificación de datos: proceso de asignar una etiqueta de sensibilidad (p. ej.</a:t>
-            </a:r>
-          </a:p>
-          <a:p>
-            <a:pPr>
-              <a:spcAft>
-                <a:spcPts val="600"/>
-              </a:spcAft>
-            </a:pPr>
-            <a:r>
-              <a:rPr sz="1500">
-                <a:solidFill>
-                  <a:srgbClr val="22282E"/>
-                </a:solidFill>
-              </a:rPr>
-              <a:t>•  Confidencial) según el daño que causaría su divulgación. Característica clave: se basa en</a:t>
-            </a:r>
-          </a:p>
-          <a:p>
-            <a:pPr>
-              <a:spcAft>
-                <a:spcPts val="600"/>
-              </a:spcAft>
-            </a:pPr>
-            <a:r>
-              <a:rPr sz="1500">
-                <a:solidFill>
-                  <a:srgbClr val="22282E"/>
-                </a:solidFill>
-              </a:rPr>
-              <a:t>•  confidencialidad y la decide el propietario del dato.</a:t>
-            </a:r>
-          </a:p>
-          <a:p>
-            <a:pPr>
-              <a:spcAft>
-                <a:spcPts val="600"/>
-              </a:spcAft>
-            </a:pPr>
-            <a:r>
-              <a:rPr sz="1500">
-                <a:solidFill>
-                  <a:srgbClr val="22282E"/>
-                </a:solidFill>
-              </a:rPr>
-              <a:t>•  Categorización de seguridad: en el mundo federal EE. UU., asignar niveles de impacto</a:t>
-            </a:r>
-          </a:p>
-          <a:p>
-            <a:pPr>
-              <a:spcAft>
-                <a:spcPts val="600"/>
-              </a:spcAft>
-            </a:pPr>
-            <a:r>
-              <a:rPr sz="1500">
-                <a:solidFill>
-                  <a:srgbClr val="22282E"/>
-                </a:solidFill>
-              </a:rPr>
-              <a:t>•  bajo/moderado/alto a confidencialidad, integridad y disponibilidad (FIPS 199).</a:t>
-            </a:r>
-          </a:p>
-          <a:p>
-            <a:pPr>
-              <a:spcAft>
-                <a:spcPts val="600"/>
-              </a:spcAft>
-            </a:pPr>
-            <a:r>
-              <a:rPr sz="1500">
-                <a:solidFill>
-                  <a:srgbClr val="22282E"/>
-                </a:solidFill>
-              </a:rPr>
-              <a:t>•  Característica: alimenta la selección de líneas base de NIST SP 800-53.</a:t>
-            </a:r>
-          </a:p>
-          <a:p>
-            <a:pPr>
-              <a:spcAft>
-                <a:spcPts val="600"/>
-              </a:spcAft>
-            </a:pPr>
-            <a:r>
-              <a:rPr sz="1500">
-                <a:solidFill>
-                  <a:srgbClr val="22282E"/>
-                </a:solidFill>
-              </a:rPr>
-              <a:t>•  Data owner (propietario): rol de negocio, normalmente directivo, responsable último de</a:t>
+              <a:t>•  Clasificar sirve para aplicar decisiones proporcionales durante creación, uso, intercambio, archivo y eliminación.</a:t>
+            </a:r>
+          </a:p>
+          <a:p>
+            <a:pPr>
+              <a:spcAft>
+                <a:spcPts val="600"/>
+              </a:spcAft>
+            </a:pPr>
+            <a:r>
+              <a:rPr sz="1500">
+                <a:solidFill>
+                  <a:srgbClr val="22282E"/>
+                </a:solidFill>
+              </a:rPr>
+              <a:t>•  Caso razonado. Un archivo cambia de dueño y conserva etiqueta antigua; se revisan evento, autoridad y propagación.</a:t>
             </a:r>
           </a:p>
         </p:txBody>
@@ -4376,7 +4887,7 @@
                   <a:srgbClr val="0B3D2E"/>
                 </a:solidFill>
               </a:rPr>
-              <a:t>🧰 Herramientas y preparación</a:t>
+              <a:t>📔 Glosario operativo complementario</a:t>
             </a:r>
           </a:p>
         </p:txBody>
@@ -4414,97 +4925,52 @@
                   <a:srgbClr val="22282E"/>
                 </a:solidFill>
               </a:rPr>
-              <a:t>•  Esta es una clase de gobierno (GRC): el "laboratorio" es de diseño documental, no de comandos.</a:t>
-            </a:r>
-          </a:p>
-          <a:p>
-            <a:pPr>
-              <a:spcAft>
-                <a:spcPts val="600"/>
-              </a:spcAft>
-            </a:pPr>
-            <a:r>
-              <a:rPr sz="1500">
-                <a:solidFill>
-                  <a:srgbClr val="22282E"/>
-                </a:solidFill>
-              </a:rPr>
-              <a:t>•  Prepara:</a:t>
-            </a:r>
-          </a:p>
-          <a:p>
-            <a:pPr>
-              <a:spcAft>
-                <a:spcPts val="600"/>
-              </a:spcAft>
-            </a:pPr>
-            <a:r>
-              <a:rPr sz="1500">
-                <a:solidFill>
-                  <a:srgbClr val="22282E"/>
-                </a:solidFill>
-              </a:rPr>
-              <a:t>•  Una hoja de cálculo (Excel, Google Sheets o LibreOffice Calc) para el inventario y la matriz.</a:t>
-            </a:r>
-          </a:p>
-          <a:p>
-            <a:pPr>
-              <a:spcAft>
-                <a:spcPts val="600"/>
-              </a:spcAft>
-            </a:pPr>
-            <a:r>
-              <a:rPr sz="1500">
-                <a:solidFill>
-                  <a:srgbClr val="22282E"/>
-                </a:solidFill>
-              </a:rPr>
-              <a:t>•  Plantillas de referencia: NIST SP 800-60 Vol. II (mapeo de tipos de información) e ISO 27001 A.8.</a:t>
-            </a:r>
-          </a:p>
-          <a:p>
-            <a:pPr>
-              <a:spcAft>
-                <a:spcPts val="600"/>
-              </a:spcAft>
-            </a:pPr>
-            <a:r>
-              <a:rPr sz="1500">
-                <a:solidFill>
-                  <a:srgbClr val="22282E"/>
-                </a:solidFill>
-              </a:rPr>
-              <a:t>•  Opcional: una herramienta de descubrimiento/clasificación para ver el concepto en la</a:t>
-            </a:r>
-          </a:p>
-          <a:p>
-            <a:pPr>
-              <a:spcAft>
-                <a:spcPts val="600"/>
-              </a:spcAft>
-            </a:pPr>
-            <a:r>
-              <a:rPr sz="1500">
-                <a:solidFill>
-                  <a:srgbClr val="22282E"/>
-                </a:solidFill>
-              </a:rPr>
-              <a:t>•  práctica (Microsoft Purview Information Protection, AWS Macie o el open source Apache Tika</a:t>
-            </a:r>
-          </a:p>
-          <a:p>
-            <a:pPr>
-              <a:spcAft>
-                <a:spcPts val="600"/>
-              </a:spcAft>
-            </a:pPr>
-            <a:r>
-              <a:rPr sz="1500">
-                <a:solidFill>
-                  <a:srgbClr val="22282E"/>
-                </a:solidFill>
-              </a:rPr>
-              <a:t>•  para extracción de metadatos). Úsalas solo sobre datos de prueba propios.</a:t>
+              <a:t>•  Término — Definición</a:t>
+            </a:r>
+          </a:p>
+          <a:p>
+            <a:pPr>
+              <a:spcAft>
+                <a:spcPts val="600"/>
+              </a:spcAft>
+            </a:pPr>
+            <a:r>
+              <a:rPr sz="1500">
+                <a:solidFill>
+                  <a:srgbClr val="22282E"/>
+                </a:solidFill>
+              </a:rPr>
+              <a:t>•  Evidencia — Información cuya procedencia y relación con un criterio pueden revisarse.</a:t>
+            </a:r>
+          </a:p>
+          <a:p>
+            <a:pPr>
+              <a:spcAft>
+                <a:spcPts val="600"/>
+              </a:spcAft>
+            </a:pPr>
+            <a:r>
+              <a:rPr sz="1500">
+                <a:solidFill>
+                  <a:srgbClr val="22282E"/>
+                </a:solidFill>
+              </a:rPr>
+              <a:t>•  Supuesto — Condición declarada de la que depende una conclusión.</a:t>
+            </a:r>
+          </a:p>
+          <a:p>
+            <a:pPr>
+              <a:spcAft>
+                <a:spcPts val="600"/>
+              </a:spcAft>
+            </a:pPr>
+            <a:r>
+              <a:rPr sz="1500">
+                <a:solidFill>
+                  <a:srgbClr val="22282E"/>
+                </a:solidFill>
+              </a:rPr>
+              <a:t>•  Riesgo residual — Exposición que permanece después del tratamiento.</a:t>
             </a:r>
           </a:p>
         </p:txBody>
@@ -4555,7 +5021,7 @@
                   <a:srgbClr val="0B3D2E"/>
                 </a:solidFill>
               </a:rPr>
-              <a:t>🧪 Laboratorio guiado — Diseñar un esquema y una política de clasificación</a:t>
+              <a:t>✅ Criterio de dominio</a:t>
             </a:r>
           </a:p>
         </p:txBody>
@@ -4593,97 +5059,7 @@
                   <a:srgbClr val="22282E"/>
                 </a:solidFill>
               </a:rPr>
-              <a:t>•  Trabajarás sobre una empresa ficticia, "NovaSalud", clínica con datos clínicos y de pago.</a:t>
-            </a:r>
-          </a:p>
-          <a:p>
-            <a:pPr>
-              <a:spcAft>
-                <a:spcPts val="600"/>
-              </a:spcAft>
-            </a:pPr>
-            <a:r>
-              <a:rPr sz="1500">
-                <a:solidFill>
-                  <a:srgbClr val="22282E"/>
-                </a:solidFill>
-              </a:rPr>
-              <a:t>•  Inventario de activos. Crea una hoja con columnas: Activo, Tipo de dato,</a:t>
-            </a:r>
-          </a:p>
-          <a:p>
-            <a:pPr>
-              <a:spcAft>
-                <a:spcPts val="600"/>
-              </a:spcAft>
-            </a:pPr>
-            <a:r>
-              <a:rPr sz="1500">
-                <a:solidFill>
-                  <a:srgbClr val="22282E"/>
-                </a:solidFill>
-              </a:rPr>
-              <a:t>•  Ubicación, Formato, Propietario, Volumen. Registra al menos 8 activos</a:t>
-            </a:r>
-          </a:p>
-          <a:p>
-            <a:pPr>
-              <a:spcAft>
-                <a:spcPts val="600"/>
-              </a:spcAft>
-            </a:pPr>
-            <a:r>
-              <a:rPr sz="1500">
-                <a:solidFill>
-                  <a:srgbClr val="22282E"/>
-                </a:solidFill>
-              </a:rPr>
-              <a:t>•  (historias clínicas, nómina, tarjetas de pago, marketing, código fuente, etc.).</a:t>
-            </a:r>
-          </a:p>
-          <a:p>
-            <a:pPr>
-              <a:spcAft>
-                <a:spcPts val="600"/>
-              </a:spcAft>
-            </a:pPr>
-            <a:r>
-              <a:rPr sz="1500">
-                <a:solidFill>
-                  <a:srgbClr val="22282E"/>
-                </a:solidFill>
-              </a:rPr>
-              <a:t>•  Define el esquema de clasificación. Propón 4 niveles comerciales:</a:t>
-            </a:r>
-          </a:p>
-          <a:p>
-            <a:pPr>
-              <a:spcAft>
-                <a:spcPts val="600"/>
-              </a:spcAft>
-            </a:pPr>
-            <a:r>
-              <a:rPr sz="1500">
-                <a:solidFill>
-                  <a:srgbClr val="22282E"/>
-                </a:solidFill>
-              </a:rPr>
-              <a:t>•  Público, Interno, Confidencial, Restringido. Para cada uno documenta: criterio de</a:t>
-            </a:r>
-          </a:p>
-          <a:p>
-            <a:pPr>
-              <a:spcAft>
-                <a:spcPts val="600"/>
-              </a:spcAft>
-            </a:pPr>
-            <a:r>
-              <a:rPr sz="1500">
-                <a:solidFill>
-                  <a:srgbClr val="22282E"/>
-                </a:solidFill>
-              </a:rPr>
-              <a:t>•  asignación, ejemplos, impacto de una fuga y controles mínimos.</a:t>
+              <a:t>•  El alumno demuestra dominio cuando explica el diagrama, resuelve el caso con evidencia, declara límites y puede defender por qué su decisión cambia si cambia un supuesto.</a:t>
             </a:r>
           </a:p>
         </p:txBody>
@@ -4734,7 +5110,7 @@
                   <a:srgbClr val="0B3D2E"/>
                 </a:solidFill>
               </a:rPr>
-              <a:t>✍️ Ejercicios</a:t>
+              <a:t>📖 Definiciones y características</a:t>
             </a:r>
           </a:p>
         </p:txBody>
@@ -4772,82 +5148,97 @@
                   <a:srgbClr val="22282E"/>
                 </a:solidFill>
               </a:rPr>
-              <a:t>•  Clasifica 10 tipos de dato reales de tu organización o de un caso conocido y justifica cada nivel.</a:t>
-            </a:r>
-          </a:p>
-          <a:p>
-            <a:pPr>
-              <a:spcAft>
-                <a:spcPts val="600"/>
-              </a:spcAft>
-            </a:pPr>
-            <a:r>
-              <a:rPr sz="1500">
-                <a:solidFill>
-                  <a:srgbClr val="22282E"/>
-                </a:solidFill>
-              </a:rPr>
-              <a:t>•  Explica con un ejemplo la diferencia entre propietario y custodio de datos.</a:t>
-            </a:r>
-          </a:p>
-          <a:p>
-            <a:pPr>
-              <a:spcAft>
-                <a:spcPts val="600"/>
-              </a:spcAft>
-            </a:pPr>
-            <a:r>
-              <a:rPr sz="1500">
-                <a:solidFill>
-                  <a:srgbClr val="22282E"/>
-                </a:solidFill>
-              </a:rPr>
-              <a:t>•  Aplica FIPS 199 a un sistema de reservas de hotel: asigna impacto C-I-A y su categoría.</a:t>
-            </a:r>
-          </a:p>
-          <a:p>
-            <a:pPr>
-              <a:spcAft>
-                <a:spcPts val="600"/>
-              </a:spcAft>
-            </a:pPr>
-            <a:r>
-              <a:rPr sz="1500">
-                <a:solidFill>
-                  <a:srgbClr val="22282E"/>
-                </a:solidFill>
-              </a:rPr>
-              <a:t>•  Redacta la sección "Manejo" para el nivel Restringido: transmisión, almacenamiento, impresión y descarte.</a:t>
-            </a:r>
-          </a:p>
-          <a:p>
-            <a:pPr>
-              <a:spcAft>
-                <a:spcPts val="600"/>
-              </a:spcAft>
-            </a:pPr>
-            <a:r>
-              <a:rPr sz="1500">
-                <a:solidFill>
-                  <a:srgbClr val="22282E"/>
-                </a:solidFill>
-              </a:rPr>
-              <a:t>•  Analiza un caso de reclasificación: ¿cuándo un dato Confidencial pasa a Público? Da criterios.</a:t>
-            </a:r>
-          </a:p>
-          <a:p>
-            <a:pPr>
-              <a:spcAft>
-                <a:spcPts val="600"/>
-              </a:spcAft>
-            </a:pPr>
-            <a:r>
-              <a:rPr sz="1500">
-                <a:solidFill>
-                  <a:srgbClr val="22282E"/>
-                </a:solidFill>
-              </a:rPr>
-              <a:t>•  Diseña una matriz que cruce nivel de clasificación × estado del dato (reposo/tránsito/uso) con el control exigido en cada celda.</a:t>
+              <a:t>•  Clasificación de datos: proceso de asignar una etiqueta de sensibilidad (p. ej.</a:t>
+            </a:r>
+          </a:p>
+          <a:p>
+            <a:pPr>
+              <a:spcAft>
+                <a:spcPts val="600"/>
+              </a:spcAft>
+            </a:pPr>
+            <a:r>
+              <a:rPr sz="1500">
+                <a:solidFill>
+                  <a:srgbClr val="22282E"/>
+                </a:solidFill>
+              </a:rPr>
+              <a:t>•  Confidencial) según el daño que causaría su divulgación. Característica clave: se basa en</a:t>
+            </a:r>
+          </a:p>
+          <a:p>
+            <a:pPr>
+              <a:spcAft>
+                <a:spcPts val="600"/>
+              </a:spcAft>
+            </a:pPr>
+            <a:r>
+              <a:rPr sz="1500">
+                <a:solidFill>
+                  <a:srgbClr val="22282E"/>
+                </a:solidFill>
+              </a:rPr>
+              <a:t>•  confidencialidad y la decide el propietario del dato.</a:t>
+            </a:r>
+          </a:p>
+          <a:p>
+            <a:pPr>
+              <a:spcAft>
+                <a:spcPts val="600"/>
+              </a:spcAft>
+            </a:pPr>
+            <a:r>
+              <a:rPr sz="1500">
+                <a:solidFill>
+                  <a:srgbClr val="22282E"/>
+                </a:solidFill>
+              </a:rPr>
+              <a:t>•  Categorización de seguridad: en el mundo federal EE. UU., asignar niveles de impacto</a:t>
+            </a:r>
+          </a:p>
+          <a:p>
+            <a:pPr>
+              <a:spcAft>
+                <a:spcPts val="600"/>
+              </a:spcAft>
+            </a:pPr>
+            <a:r>
+              <a:rPr sz="1500">
+                <a:solidFill>
+                  <a:srgbClr val="22282E"/>
+                </a:solidFill>
+              </a:rPr>
+              <a:t>•  bajo/moderado/alto a confidencialidad, integridad y disponibilidad (FIPS 199).</a:t>
+            </a:r>
+          </a:p>
+          <a:p>
+            <a:pPr>
+              <a:spcAft>
+                <a:spcPts val="600"/>
+              </a:spcAft>
+            </a:pPr>
+            <a:r>
+              <a:rPr sz="1500">
+                <a:solidFill>
+                  <a:srgbClr val="22282E"/>
+                </a:solidFill>
+              </a:rPr>
+              <a:t>•  Característica: alimenta la selección de líneas base de NIST SP 800-53.</a:t>
+            </a:r>
+          </a:p>
+          <a:p>
+            <a:pPr>
+              <a:spcAft>
+                <a:spcPts val="600"/>
+              </a:spcAft>
+            </a:pPr>
+            <a:r>
+              <a:rPr sz="1500">
+                <a:solidFill>
+                  <a:srgbClr val="22282E"/>
+                </a:solidFill>
+              </a:rPr>
+              <a:t>•  Data owner (propietario): rol de negocio, normalmente directivo, responsable último de</a:t>
             </a:r>
           </a:p>
         </p:txBody>
@@ -4898,7 +5289,7 @@
                   <a:srgbClr val="0B3D2E"/>
                 </a:solidFill>
               </a:rPr>
-              <a:t>📝 Reto verificable</a:t>
+              <a:t>🧰 Herramientas y preparación</a:t>
             </a:r>
           </a:p>
         </p:txBody>
@@ -4936,82 +5327,97 @@
                   <a:srgbClr val="22282E"/>
                 </a:solidFill>
               </a:rPr>
-              <a:t>•  Entrega una Política de Clasificación de Datos de 2–3 páginas para NovaSalud que incluya:</a:t>
-            </a:r>
-          </a:p>
-          <a:p>
-            <a:pPr>
-              <a:spcAft>
-                <a:spcPts val="600"/>
-              </a:spcAft>
-            </a:pPr>
-            <a:r>
-              <a:rPr sz="1500">
-                <a:solidFill>
-                  <a:srgbClr val="22282E"/>
-                </a:solidFill>
-              </a:rPr>
-              <a:t>•  esquema de 4 niveles con criterios, tabla de roles (owner/custodian/processor), guía de</a:t>
-            </a:r>
-          </a:p>
-          <a:p>
-            <a:pPr>
-              <a:spcAft>
-                <a:spcPts val="600"/>
-              </a:spcAft>
-            </a:pPr>
-            <a:r>
-              <a:rPr sz="1500">
-                <a:solidFill>
-                  <a:srgbClr val="22282E"/>
-                </a:solidFill>
-              </a:rPr>
-              <a:t>•  etiquetado y manejo por nivel, y el ciclo de vida con controles por fase.</a:t>
-            </a:r>
-          </a:p>
-          <a:p>
-            <a:pPr>
-              <a:spcAft>
-                <a:spcPts val="600"/>
-              </a:spcAft>
-            </a:pPr>
-            <a:r>
-              <a:rPr sz="1500">
-                <a:solidFill>
-                  <a:srgbClr val="22282E"/>
-                </a:solidFill>
-              </a:rPr>
-              <a:t>•  Criterio de aceptación: un revisor externo, leyendo solo tu política, puede clasificar</a:t>
-            </a:r>
-          </a:p>
-          <a:p>
-            <a:pPr>
-              <a:spcAft>
-                <a:spcPts val="600"/>
-              </a:spcAft>
-            </a:pPr>
-            <a:r>
-              <a:rPr sz="1500">
-                <a:solidFill>
-                  <a:srgbClr val="22282E"/>
-                </a:solidFill>
-              </a:rPr>
-              <a:t>•  correctamente 5 activos nuevos que no estaban en el inventario y decir qué controles aplicarles,</a:t>
-            </a:r>
-          </a:p>
-          <a:p>
-            <a:pPr>
-              <a:spcAft>
-                <a:spcPts val="600"/>
-              </a:spcAft>
-            </a:pPr>
-            <a:r>
-              <a:rPr sz="1500">
-                <a:solidFill>
-                  <a:srgbClr val="22282E"/>
-                </a:solidFill>
-              </a:rPr>
-              <a:t>•  sin hacerte ninguna pregunta adicional.</a:t>
+              <a:t>•  Esta es una clase de gobierno (GRC): el "laboratorio" es de diseño documental, no de comandos.</a:t>
+            </a:r>
+          </a:p>
+          <a:p>
+            <a:pPr>
+              <a:spcAft>
+                <a:spcPts val="600"/>
+              </a:spcAft>
+            </a:pPr>
+            <a:r>
+              <a:rPr sz="1500">
+                <a:solidFill>
+                  <a:srgbClr val="22282E"/>
+                </a:solidFill>
+              </a:rPr>
+              <a:t>•  Prepara:</a:t>
+            </a:r>
+          </a:p>
+          <a:p>
+            <a:pPr>
+              <a:spcAft>
+                <a:spcPts val="600"/>
+              </a:spcAft>
+            </a:pPr>
+            <a:r>
+              <a:rPr sz="1500">
+                <a:solidFill>
+                  <a:srgbClr val="22282E"/>
+                </a:solidFill>
+              </a:rPr>
+              <a:t>•  Una hoja de cálculo (Excel, Google Sheets o LibreOffice Calc) para el inventario y la matriz.</a:t>
+            </a:r>
+          </a:p>
+          <a:p>
+            <a:pPr>
+              <a:spcAft>
+                <a:spcPts val="600"/>
+              </a:spcAft>
+            </a:pPr>
+            <a:r>
+              <a:rPr sz="1500">
+                <a:solidFill>
+                  <a:srgbClr val="22282E"/>
+                </a:solidFill>
+              </a:rPr>
+              <a:t>•  Plantillas de referencia: NIST SP 800-60 Vol. II (mapeo de tipos de información) e ISO 27001 A.8.</a:t>
+            </a:r>
+          </a:p>
+          <a:p>
+            <a:pPr>
+              <a:spcAft>
+                <a:spcPts val="600"/>
+              </a:spcAft>
+            </a:pPr>
+            <a:r>
+              <a:rPr sz="1500">
+                <a:solidFill>
+                  <a:srgbClr val="22282E"/>
+                </a:solidFill>
+              </a:rPr>
+              <a:t>•  Opcional: una herramienta de descubrimiento/clasificación para ver el concepto en la</a:t>
+            </a:r>
+          </a:p>
+          <a:p>
+            <a:pPr>
+              <a:spcAft>
+                <a:spcPts val="600"/>
+              </a:spcAft>
+            </a:pPr>
+            <a:r>
+              <a:rPr sz="1500">
+                <a:solidFill>
+                  <a:srgbClr val="22282E"/>
+                </a:solidFill>
+              </a:rPr>
+              <a:t>•  práctica (Microsoft Purview Information Protection, AWS Macie o el open source Apache Tika</a:t>
+            </a:r>
+          </a:p>
+          <a:p>
+            <a:pPr>
+              <a:spcAft>
+                <a:spcPts val="600"/>
+              </a:spcAft>
+            </a:pPr>
+            <a:r>
+              <a:rPr sz="1500">
+                <a:solidFill>
+                  <a:srgbClr val="22282E"/>
+                </a:solidFill>
+              </a:rPr>
+              <a:t>•  para extracción de metadatos). Úsalas solo sobre datos de prueba propios.</a:t>
             </a:r>
           </a:p>
         </p:txBody>
